--- a/docs/Lectures/Week06/Lecture06_GEOG2475_Classification.pptx
+++ b/docs/Lectures/Week06/Lecture06_GEOG2475_Classification.pptx
@@ -239,7 +239,7 @@
             <a:fld id="{66C520B4-85AA-9542-8CF7-3D2DDCE6041D}" type="datetimeFigureOut">
               <a:rPr lang="en-US" smtClean="0"/>
               <a:pPr/>
-              <a:t>9/21/2025</a:t>
+              <a:t>9/25/2025</a:t>
             </a:fld>
             <a:endParaRPr lang="en-US"/>
           </a:p>
@@ -1274,7 +1274,7 @@
           <a:p>
             <a:fld id="{2BAC3D6C-4C04-4098-BFD3-3A35EE232A02}" type="datetime1">
               <a:rPr lang="en-US" smtClean="0"/>
-              <a:t>9/21/2025</a:t>
+              <a:t>9/25/2025</a:t>
             </a:fld>
             <a:endParaRPr lang="en-US"/>
           </a:p>
@@ -1478,7 +1478,7 @@
           <a:p>
             <a:fld id="{463367AB-96C5-48C1-ABEF-4922F06666CC}" type="datetime1">
               <a:rPr lang="en-US" smtClean="0"/>
-              <a:t>9/21/2025</a:t>
+              <a:t>9/25/2025</a:t>
             </a:fld>
             <a:endParaRPr lang="en-US"/>
           </a:p>
@@ -1841,7 +1841,7 @@
           <a:p>
             <a:fld id="{004F2300-F914-44F4-9F48-323AB4F049A8}" type="datetime1">
               <a:rPr lang="en-US" smtClean="0"/>
-              <a:t>9/21/2025</a:t>
+              <a:t>9/25/2025</a:t>
             </a:fld>
             <a:endParaRPr lang="en-US"/>
           </a:p>
@@ -2153,7 +2153,7 @@
           <a:p>
             <a:fld id="{7B6AF446-C7A3-4A2D-B01C-4080BC0DDC51}" type="datetime1">
               <a:rPr lang="en-US" smtClean="0"/>
-              <a:t>9/21/2025</a:t>
+              <a:t>9/25/2025</a:t>
             </a:fld>
             <a:endParaRPr lang="en-US"/>
           </a:p>
@@ -2352,7 +2352,7 @@
           <a:p>
             <a:fld id="{E77A5B41-BFC4-4275-B283-99B49DA65AE7}" type="datetime1">
               <a:rPr lang="en-US" smtClean="0"/>
-              <a:t>9/21/2025</a:t>
+              <a:t>9/25/2025</a:t>
             </a:fld>
             <a:endParaRPr lang="en-US"/>
           </a:p>
@@ -2665,7 +2665,7 @@
           <a:p>
             <a:fld id="{FC9F5041-7C46-4557-A8EF-D9C07452E04F}" type="datetime1">
               <a:rPr lang="en-US" smtClean="0"/>
-              <a:t>9/21/2025</a:t>
+              <a:t>9/25/2025</a:t>
             </a:fld>
             <a:endParaRPr lang="en-US"/>
           </a:p>
@@ -2919,7 +2919,7 @@
           <a:p>
             <a:fld id="{9165F29B-8031-46B1-B8C6-0E15991220BD}" type="datetime1">
               <a:rPr lang="en-US" smtClean="0"/>
-              <a:t>9/21/2025</a:t>
+              <a:t>9/25/2025</a:t>
             </a:fld>
             <a:endParaRPr lang="en-US"/>
           </a:p>
@@ -3342,7 +3342,7 @@
           <a:p>
             <a:fld id="{EA26BC96-89B3-4A8F-8C3A-8FECB7F0AF50}" type="datetime1">
               <a:rPr lang="en-US" smtClean="0"/>
-              <a:t>9/21/2025</a:t>
+              <a:t>9/25/2025</a:t>
             </a:fld>
             <a:endParaRPr lang="en-US"/>
           </a:p>
@@ -3466,7 +3466,7 @@
           <a:p>
             <a:fld id="{979F6BEE-F3E4-4F76-B56D-1C48BBD7AEA9}" type="datetime1">
               <a:rPr lang="en-US" smtClean="0"/>
-              <a:t>9/21/2025</a:t>
+              <a:t>9/25/2025</a:t>
             </a:fld>
             <a:endParaRPr lang="en-US"/>
           </a:p>
@@ -3562,7 +3562,7 @@
           <a:p>
             <a:fld id="{5EBF79E3-AE5C-4717-978E-15FC3620ACEF}" type="datetime1">
               <a:rPr lang="en-US" smtClean="0"/>
-              <a:t>9/21/2025</a:t>
+              <a:t>9/25/2025</a:t>
             </a:fld>
             <a:endParaRPr lang="en-US"/>
           </a:p>
@@ -3940,7 +3940,7 @@
           <a:p>
             <a:fld id="{07B82B69-02FF-4A00-BF94-063310C8EF70}" type="datetime1">
               <a:rPr lang="en-US" smtClean="0"/>
-              <a:t>9/21/2025</a:t>
+              <a:t>9/25/2025</a:t>
             </a:fld>
             <a:endParaRPr lang="en-US"/>
           </a:p>
@@ -4149,7 +4149,7 @@
           <a:p>
             <a:fld id="{F4D4FE18-0348-44C2-B6F7-2E0D6E3F701A}" type="datetime1">
               <a:rPr lang="en-US" smtClean="0"/>
-              <a:t>9/21/2025</a:t>
+              <a:t>9/25/2025</a:t>
             </a:fld>
             <a:endParaRPr lang="en-US"/>
           </a:p>
@@ -4432,7 +4432,7 @@
           <a:p>
             <a:fld id="{8C7A3C19-50BF-43F6-AD63-C05469BE5035}" type="datetime1">
               <a:rPr lang="en-US" smtClean="0"/>
-              <a:t>9/21/2025</a:t>
+              <a:t>9/25/2025</a:t>
             </a:fld>
             <a:endParaRPr lang="en-US"/>
           </a:p>
@@ -4624,7 +4624,7 @@
           <a:p>
             <a:fld id="{FED35F4A-7979-4619-A182-7748F9FBAA45}" type="datetime1">
               <a:rPr lang="en-US" smtClean="0"/>
-              <a:t>9/21/2025</a:t>
+              <a:t>9/25/2025</a:t>
             </a:fld>
             <a:endParaRPr lang="en-US"/>
           </a:p>
@@ -4987,7 +4987,7 @@
           <a:p>
             <a:fld id="{4E8A0E10-3CDB-43FE-B1B5-7D3654751138}" type="datetime1">
               <a:rPr lang="en-US" smtClean="0"/>
-              <a:t>9/21/2025</a:t>
+              <a:t>9/25/2025</a:t>
             </a:fld>
             <a:endParaRPr lang="en-US"/>
           </a:p>
@@ -5299,7 +5299,7 @@
           <a:p>
             <a:fld id="{C6B0FEA4-C6CA-4262-94C7-989766AA3A47}" type="datetime1">
               <a:rPr lang="en-US" smtClean="0"/>
-              <a:t>9/21/2025</a:t>
+              <a:t>9/25/2025</a:t>
             </a:fld>
             <a:endParaRPr lang="en-US"/>
           </a:p>
@@ -5498,7 +5498,7 @@
           <a:p>
             <a:fld id="{6F65A5F7-BE7B-4360-B821-FCDB8E9197AC}" type="datetime1">
               <a:rPr lang="en-US" smtClean="0"/>
-              <a:t>9/21/2025</a:t>
+              <a:t>9/25/2025</a:t>
             </a:fld>
             <a:endParaRPr lang="en-US"/>
           </a:p>
@@ -5811,7 +5811,7 @@
           <a:p>
             <a:fld id="{6145D492-0F60-495A-BAAC-3C877C1D64A2}" type="datetime1">
               <a:rPr lang="en-US" smtClean="0"/>
-              <a:t>9/21/2025</a:t>
+              <a:t>9/25/2025</a:t>
             </a:fld>
             <a:endParaRPr lang="en-US"/>
           </a:p>
@@ -6065,7 +6065,7 @@
           <a:p>
             <a:fld id="{4A322FED-C97B-4E3C-B05B-1278829CCA0F}" type="datetime1">
               <a:rPr lang="en-US" smtClean="0"/>
-              <a:t>9/21/2025</a:t>
+              <a:t>9/25/2025</a:t>
             </a:fld>
             <a:endParaRPr lang="en-US"/>
           </a:p>
@@ -6488,7 +6488,7 @@
           <a:p>
             <a:fld id="{1BBF91E7-DD27-45EE-9FAC-A58839C2E3FB}" type="datetime1">
               <a:rPr lang="en-US" smtClean="0"/>
-              <a:t>9/21/2025</a:t>
+              <a:t>9/25/2025</a:t>
             </a:fld>
             <a:endParaRPr lang="en-US"/>
           </a:p>
@@ -6612,7 +6612,7 @@
           <a:p>
             <a:fld id="{470DB943-D34E-498D-BB5B-1BC0D01A4C3C}" type="datetime1">
               <a:rPr lang="en-US" smtClean="0"/>
-              <a:t>9/21/2025</a:t>
+              <a:t>9/25/2025</a:t>
             </a:fld>
             <a:endParaRPr lang="en-US"/>
           </a:p>
@@ -6708,7 +6708,7 @@
           <a:p>
             <a:fld id="{0EF88AC7-A362-47DE-B037-3A7E785BA73D}" type="datetime1">
               <a:rPr lang="en-US" smtClean="0"/>
-              <a:t>9/21/2025</a:t>
+              <a:t>9/25/2025</a:t>
             </a:fld>
             <a:endParaRPr lang="en-US"/>
           </a:p>
@@ -7009,7 +7009,7 @@
           <a:p>
             <a:fld id="{736F0D2F-BB82-470C-9FE9-67ACBD4EA48C}" type="datetime1">
               <a:rPr lang="en-US" smtClean="0"/>
-              <a:t>9/21/2025</a:t>
+              <a:t>9/25/2025</a:t>
             </a:fld>
             <a:endParaRPr lang="en-US"/>
           </a:p>
@@ -7399,7 +7399,7 @@
           <a:p>
             <a:fld id="{1E09BAED-B7FC-4220-8037-60663F890984}" type="datetime1">
               <a:rPr lang="en-US" smtClean="0"/>
-              <a:t>9/21/2025</a:t>
+              <a:t>9/25/2025</a:t>
             </a:fld>
             <a:endParaRPr lang="en-US"/>
           </a:p>
@@ -7692,7 +7692,7 @@
           <a:p>
             <a:fld id="{BB3C0B96-D43B-410F-A514-3967CACDF6C4}" type="datetime1">
               <a:rPr lang="en-US" smtClean="0"/>
-              <a:t>9/21/2025</a:t>
+              <a:t>9/25/2025</a:t>
             </a:fld>
             <a:endParaRPr lang="en-US"/>
           </a:p>
@@ -7884,7 +7884,7 @@
           <a:p>
             <a:fld id="{C63DFB46-027F-4778-8182-714012A6E051}" type="datetime1">
               <a:rPr lang="en-US" smtClean="0"/>
-              <a:t>9/21/2025</a:t>
+              <a:t>9/25/2025</a:t>
             </a:fld>
             <a:endParaRPr lang="en-US"/>
           </a:p>
@@ -8247,7 +8247,7 @@
           <a:p>
             <a:fld id="{770FD05A-9631-4BEE-9AA4-5575ADA850E9}" type="datetime1">
               <a:rPr lang="en-US" smtClean="0"/>
-              <a:t>9/21/2025</a:t>
+              <a:t>9/25/2025</a:t>
             </a:fld>
             <a:endParaRPr lang="en-US"/>
           </a:p>
@@ -8559,7 +8559,7 @@
           <a:p>
             <a:fld id="{ED291B17-9318-49DB-B28B-6E5994AE9581}" type="datetime1">
               <a:rPr lang="en-US" smtClean="0"/>
-              <a:t>9/21/2025</a:t>
+              <a:t>9/25/2025</a:t>
             </a:fld>
             <a:endParaRPr lang="en-US" dirty="0"/>
           </a:p>
@@ -8757,7 +8757,7 @@
           <a:p>
             <a:fld id="{78DD82B9-B8EE-4375-B6FF-88FA6ABB15D9}" type="datetime1">
               <a:rPr lang="en-US" smtClean="0"/>
-              <a:t>9/21/2025</a:t>
+              <a:t>9/25/2025</a:t>
             </a:fld>
             <a:endParaRPr lang="en-US" dirty="0"/>
           </a:p>
@@ -9069,7 +9069,7 @@
           <a:p>
             <a:fld id="{B2497495-0637-405E-AE64-5CC7506D51F5}" type="datetime1">
               <a:rPr lang="en-US" smtClean="0"/>
-              <a:t>9/21/2025</a:t>
+              <a:t>9/25/2025</a:t>
             </a:fld>
             <a:endParaRPr lang="en-US" dirty="0"/>
           </a:p>
@@ -9322,7 +9322,7 @@
           <a:p>
             <a:fld id="{7BFFD690-9426-415D-8B65-26881E07B2D4}" type="datetime1">
               <a:rPr lang="en-US" smtClean="0"/>
-              <a:t>9/21/2025</a:t>
+              <a:t>9/25/2025</a:t>
             </a:fld>
             <a:endParaRPr lang="en-US" dirty="0"/>
           </a:p>
@@ -9744,7 +9744,7 @@
           <a:p>
             <a:fld id="{04C4989A-474C-40DE-95B9-011C28B71673}" type="datetime1">
               <a:rPr lang="en-US" smtClean="0"/>
-              <a:t>9/21/2025</a:t>
+              <a:t>9/25/2025</a:t>
             </a:fld>
             <a:endParaRPr lang="en-US" dirty="0"/>
           </a:p>
@@ -9867,7 +9867,7 @@
           <a:p>
             <a:fld id="{5DB4ED54-5B5E-4A04-93D3-5772E3CE3818}" type="datetime1">
               <a:rPr lang="en-US" smtClean="0"/>
-              <a:t>9/21/2025</a:t>
+              <a:t>9/25/2025</a:t>
             </a:fld>
             <a:endParaRPr lang="en-US" dirty="0"/>
           </a:p>
@@ -10108,7 +10108,7 @@
           <a:p>
             <a:fld id="{E43A95C9-8F46-4670-8D9D-84E56B4CFD5A}" type="datetime1">
               <a:rPr lang="en-US" smtClean="0"/>
-              <a:t>9/21/2025</a:t>
+              <a:t>9/25/2025</a:t>
             </a:fld>
             <a:endParaRPr lang="en-US"/>
           </a:p>
@@ -10204,7 +10204,7 @@
           <a:p>
             <a:fld id="{4EDE50D6-574B-40AF-946F-D52A04ADE379}" type="datetime1">
               <a:rPr lang="en-US" smtClean="0"/>
-              <a:t>9/21/2025</a:t>
+              <a:t>9/25/2025</a:t>
             </a:fld>
             <a:endParaRPr lang="en-US" dirty="0"/>
           </a:p>
@@ -10581,7 +10581,7 @@
           <a:p>
             <a:fld id="{D82884F1-FFEA-405F-9602-3DCA865EDA4E}" type="datetime1">
               <a:rPr lang="en-US" smtClean="0"/>
-              <a:t>9/21/2025</a:t>
+              <a:t>9/25/2025</a:t>
             </a:fld>
             <a:endParaRPr lang="en-US" dirty="0"/>
           </a:p>
@@ -10874,7 +10874,7 @@
           <a:p>
             <a:fld id="{7E18DB4A-8810-4A10-AD5C-D5E2C667F5B3}" type="datetime1">
               <a:rPr lang="en-US" smtClean="0"/>
-              <a:t>9/21/2025</a:t>
+              <a:t>9/25/2025</a:t>
             </a:fld>
             <a:endParaRPr lang="en-US" dirty="0"/>
           </a:p>
@@ -11066,7 +11066,7 @@
           <a:p>
             <a:fld id="{2CED4963-E985-44C4-B8C4-FDD613B7C2F8}" type="datetime1">
               <a:rPr lang="en-US" smtClean="0"/>
-              <a:t>9/21/2025</a:t>
+              <a:t>9/25/2025</a:t>
             </a:fld>
             <a:endParaRPr lang="en-US" dirty="0"/>
           </a:p>
@@ -11428,7 +11428,7 @@
           <a:p>
             <a:fld id="{ED291B17-9318-49DB-B28B-6E5994AE9581}" type="datetime1">
               <a:rPr lang="en-US" smtClean="0"/>
-              <a:t>9/21/2025</a:t>
+              <a:t>9/25/2025</a:t>
             </a:fld>
             <a:endParaRPr lang="en-US" dirty="0"/>
           </a:p>
@@ -11908,7 +11908,7 @@
           <a:p>
             <a:fld id="{ED291B17-9318-49DB-B28B-6E5994AE9581}" type="datetime1">
               <a:rPr lang="en-US" smtClean="0"/>
-              <a:t>9/21/2025</a:t>
+              <a:t>9/25/2025</a:t>
             </a:fld>
             <a:endParaRPr lang="en-US" dirty="0"/>
           </a:p>
@@ -12106,7 +12106,7 @@
           <a:p>
             <a:fld id="{78DD82B9-B8EE-4375-B6FF-88FA6ABB15D9}" type="datetime1">
               <a:rPr lang="en-US" smtClean="0"/>
-              <a:t>9/21/2025</a:t>
+              <a:t>9/25/2025</a:t>
             </a:fld>
             <a:endParaRPr lang="en-US" dirty="0"/>
           </a:p>
@@ -12418,7 +12418,7 @@
           <a:p>
             <a:fld id="{B2497495-0637-405E-AE64-5CC7506D51F5}" type="datetime1">
               <a:rPr lang="en-US" smtClean="0"/>
-              <a:t>9/21/2025</a:t>
+              <a:t>9/25/2025</a:t>
             </a:fld>
             <a:endParaRPr lang="en-US" dirty="0"/>
           </a:p>
@@ -12671,7 +12671,7 @@
           <a:p>
             <a:fld id="{7BFFD690-9426-415D-8B65-26881E07B2D4}" type="datetime1">
               <a:rPr lang="en-US" smtClean="0"/>
-              <a:t>9/21/2025</a:t>
+              <a:t>9/25/2025</a:t>
             </a:fld>
             <a:endParaRPr lang="en-US" dirty="0"/>
           </a:p>
@@ -13093,7 +13093,7 @@
           <a:p>
             <a:fld id="{E5975E7C-2B02-474E-8FA0-86410A5FC033}" type="datetime1">
               <a:rPr lang="en-US" smtClean="0"/>
-              <a:t>9/21/2025</a:t>
+              <a:t>9/25/2025</a:t>
             </a:fld>
             <a:endParaRPr lang="en-US"/>
           </a:p>
@@ -13516,7 +13516,7 @@
           <a:p>
             <a:fld id="{04C4989A-474C-40DE-95B9-011C28B71673}" type="datetime1">
               <a:rPr lang="en-US" smtClean="0"/>
-              <a:t>9/21/2025</a:t>
+              <a:t>9/25/2025</a:t>
             </a:fld>
             <a:endParaRPr lang="en-US" dirty="0"/>
           </a:p>
@@ -13639,7 +13639,7 @@
           <a:p>
             <a:fld id="{5DB4ED54-5B5E-4A04-93D3-5772E3CE3818}" type="datetime1">
               <a:rPr lang="en-US" smtClean="0"/>
-              <a:t>9/21/2025</a:t>
+              <a:t>9/25/2025</a:t>
             </a:fld>
             <a:endParaRPr lang="en-US" dirty="0"/>
           </a:p>
@@ -13734,7 +13734,7 @@
           <a:p>
             <a:fld id="{4EDE50D6-574B-40AF-946F-D52A04ADE379}" type="datetime1">
               <a:rPr lang="en-US" smtClean="0"/>
-              <a:t>9/21/2025</a:t>
+              <a:t>9/25/2025</a:t>
             </a:fld>
             <a:endParaRPr lang="en-US" dirty="0"/>
           </a:p>
@@ -14111,7 +14111,7 @@
           <a:p>
             <a:fld id="{D82884F1-FFEA-405F-9602-3DCA865EDA4E}" type="datetime1">
               <a:rPr lang="en-US" smtClean="0"/>
-              <a:t>9/21/2025</a:t>
+              <a:t>9/25/2025</a:t>
             </a:fld>
             <a:endParaRPr lang="en-US" dirty="0"/>
           </a:p>
@@ -14404,7 +14404,7 @@
           <a:p>
             <a:fld id="{7E18DB4A-8810-4A10-AD5C-D5E2C667F5B3}" type="datetime1">
               <a:rPr lang="en-US" smtClean="0"/>
-              <a:t>9/21/2025</a:t>
+              <a:t>9/25/2025</a:t>
             </a:fld>
             <a:endParaRPr lang="en-US" dirty="0"/>
           </a:p>
@@ -14596,7 +14596,7 @@
           <a:p>
             <a:fld id="{2CED4963-E985-44C4-B8C4-FDD613B7C2F8}" type="datetime1">
               <a:rPr lang="en-US" smtClean="0"/>
-              <a:t>9/21/2025</a:t>
+              <a:t>9/25/2025</a:t>
             </a:fld>
             <a:endParaRPr lang="en-US" dirty="0"/>
           </a:p>
@@ -14958,7 +14958,7 @@
           <a:p>
             <a:fld id="{ED291B17-9318-49DB-B28B-6E5994AE9581}" type="datetime1">
               <a:rPr lang="en-US" smtClean="0"/>
-              <a:t>9/21/2025</a:t>
+              <a:t>9/25/2025</a:t>
             </a:fld>
             <a:endParaRPr lang="en-US" dirty="0"/>
           </a:p>
@@ -15253,6 +15253,13 @@
             <a:schemeClr val="lt1"/>
           </a:fontRef>
         </p:style>
+        <p:txBody>
+          <a:bodyPr/>
+          <a:lstStyle/>
+          <a:p>
+            <a:endParaRPr lang="zh-CN" altLang="en-US"/>
+          </a:p>
+        </p:txBody>
       </p:sp>
       <p:sp>
         <p:nvSpPr>
@@ -15438,7 +15445,7 @@
           <a:p>
             <a:fld id="{ED291B17-9318-49DB-B28B-6E5994AE9581}" type="datetime1">
               <a:rPr lang="en-US" smtClean="0"/>
-              <a:t>9/21/2025</a:t>
+              <a:t>9/25/2025</a:t>
             </a:fld>
             <a:endParaRPr lang="en-US" dirty="0"/>
           </a:p>
@@ -15634,7 +15641,7 @@
           <a:p>
             <a:fld id="{78DD82B9-B8EE-4375-B6FF-88FA6ABB15D9}" type="datetime1">
               <a:rPr lang="en-US" smtClean="0"/>
-              <a:t>9/21/2025</a:t>
+              <a:t>9/25/2025</a:t>
             </a:fld>
             <a:endParaRPr lang="en-US" dirty="0"/>
           </a:p>
@@ -15769,7 +15776,7 @@
           <a:p>
             <a:fld id="{79154FF1-2CCB-4C67-BF4F-DF19FC698996}" type="datetime1">
               <a:rPr lang="en-US" smtClean="0"/>
-              <a:t>9/21/2025</a:t>
+              <a:t>9/25/2025</a:t>
             </a:fld>
             <a:endParaRPr lang="en-US"/>
           </a:p>
@@ -16069,7 +16076,7 @@
           <a:p>
             <a:fld id="{B2497495-0637-405E-AE64-5CC7506D51F5}" type="datetime1">
               <a:rPr lang="en-US" smtClean="0"/>
-              <a:t>9/21/2025</a:t>
+              <a:t>9/25/2025</a:t>
             </a:fld>
             <a:endParaRPr lang="en-US" dirty="0"/>
           </a:p>
@@ -16320,7 +16327,7 @@
           <a:p>
             <a:fld id="{7BFFD690-9426-415D-8B65-26881E07B2D4}" type="datetime1">
               <a:rPr lang="en-US" smtClean="0"/>
-              <a:t>9/21/2025</a:t>
+              <a:t>9/25/2025</a:t>
             </a:fld>
             <a:endParaRPr lang="en-US" dirty="0"/>
           </a:p>
@@ -16740,7 +16747,7 @@
           <a:p>
             <a:fld id="{04C4989A-474C-40DE-95B9-011C28B71673}" type="datetime1">
               <a:rPr lang="en-US" smtClean="0"/>
-              <a:t>9/21/2025</a:t>
+              <a:t>9/25/2025</a:t>
             </a:fld>
             <a:endParaRPr lang="en-US" dirty="0"/>
           </a:p>
@@ -16863,7 +16870,7 @@
           <a:p>
             <a:fld id="{5DB4ED54-5B5E-4A04-93D3-5772E3CE3818}" type="datetime1">
               <a:rPr lang="en-US" smtClean="0"/>
-              <a:t>9/21/2025</a:t>
+              <a:t>9/25/2025</a:t>
             </a:fld>
             <a:endParaRPr lang="en-US" dirty="0"/>
           </a:p>
@@ -16958,7 +16965,7 @@
           <a:p>
             <a:fld id="{4EDE50D6-574B-40AF-946F-D52A04ADE379}" type="datetime1">
               <a:rPr lang="en-US" smtClean="0"/>
-              <a:t>9/21/2025</a:t>
+              <a:t>9/25/2025</a:t>
             </a:fld>
             <a:endParaRPr lang="en-US" dirty="0"/>
           </a:p>
@@ -17334,7 +17341,7 @@
           <a:p>
             <a:fld id="{D82884F1-FFEA-405F-9602-3DCA865EDA4E}" type="datetime1">
               <a:rPr lang="en-US" smtClean="0"/>
-              <a:t>9/21/2025</a:t>
+              <a:t>9/25/2025</a:t>
             </a:fld>
             <a:endParaRPr lang="en-US" dirty="0"/>
           </a:p>
@@ -17627,7 +17634,7 @@
           <a:p>
             <a:fld id="{7E18DB4A-8810-4A10-AD5C-D5E2C667F5B3}" type="datetime1">
               <a:rPr lang="en-US" smtClean="0"/>
-              <a:t>9/21/2025</a:t>
+              <a:t>9/25/2025</a:t>
             </a:fld>
             <a:endParaRPr lang="en-US" dirty="0"/>
           </a:p>
@@ -17819,7 +17826,7 @@
           <a:p>
             <a:fld id="{2CED4963-E985-44C4-B8C4-FDD613B7C2F8}" type="datetime1">
               <a:rPr lang="en-US" smtClean="0"/>
-              <a:t>9/21/2025</a:t>
+              <a:t>9/25/2025</a:t>
             </a:fld>
             <a:endParaRPr lang="en-US" dirty="0"/>
           </a:p>
@@ -18181,7 +18188,7 @@
           <a:p>
             <a:fld id="{ED291B17-9318-49DB-B28B-6E5994AE9581}" type="datetime1">
               <a:rPr lang="en-US" smtClean="0"/>
-              <a:t>9/21/2025</a:t>
+              <a:t>9/25/2025</a:t>
             </a:fld>
             <a:endParaRPr lang="en-US" dirty="0"/>
           </a:p>
@@ -18492,7 +18499,7 @@
           <a:p>
             <a:fld id="{ED291B17-9318-49DB-B28B-6E5994AE9581}" type="datetime1">
               <a:rPr lang="en-US" smtClean="0"/>
-              <a:t>9/21/2025</a:t>
+              <a:t>9/25/2025</a:t>
             </a:fld>
             <a:endParaRPr lang="en-US" dirty="0"/>
           </a:p>
@@ -18599,7 +18606,7 @@
           <a:p>
             <a:fld id="{D33F9D0A-F538-4910-B89C-0793149889D3}" type="datetime1">
               <a:rPr lang="en-US" smtClean="0"/>
-              <a:t>9/21/2025</a:t>
+              <a:t>9/25/2025</a:t>
             </a:fld>
             <a:endParaRPr lang="en-US"/>
           </a:p>
@@ -18786,7 +18793,7 @@
           <a:p>
             <a:fld id="{78DD82B9-B8EE-4375-B6FF-88FA6ABB15D9}" type="datetime1">
               <a:rPr lang="en-US" smtClean="0"/>
-              <a:t>9/21/2025</a:t>
+              <a:t>9/25/2025</a:t>
             </a:fld>
             <a:endParaRPr lang="en-US" dirty="0"/>
           </a:p>
@@ -19098,7 +19105,7 @@
           <a:p>
             <a:fld id="{B2497495-0637-405E-AE64-5CC7506D51F5}" type="datetime1">
               <a:rPr lang="en-US" smtClean="0"/>
-              <a:t>9/21/2025</a:t>
+              <a:t>9/25/2025</a:t>
             </a:fld>
             <a:endParaRPr lang="en-US" dirty="0"/>
           </a:p>
@@ -19351,7 +19358,7 @@
           <a:p>
             <a:fld id="{7BFFD690-9426-415D-8B65-26881E07B2D4}" type="datetime1">
               <a:rPr lang="en-US" smtClean="0"/>
-              <a:t>9/21/2025</a:t>
+              <a:t>9/25/2025</a:t>
             </a:fld>
             <a:endParaRPr lang="en-US" dirty="0"/>
           </a:p>
@@ -19773,7 +19780,7 @@
           <a:p>
             <a:fld id="{04C4989A-474C-40DE-95B9-011C28B71673}" type="datetime1">
               <a:rPr lang="en-US" smtClean="0"/>
-              <a:t>9/21/2025</a:t>
+              <a:t>9/25/2025</a:t>
             </a:fld>
             <a:endParaRPr lang="en-US" dirty="0"/>
           </a:p>
@@ -19896,7 +19903,7 @@
           <a:p>
             <a:fld id="{5DB4ED54-5B5E-4A04-93D3-5772E3CE3818}" type="datetime1">
               <a:rPr lang="en-US" smtClean="0"/>
-              <a:t>9/21/2025</a:t>
+              <a:t>9/25/2025</a:t>
             </a:fld>
             <a:endParaRPr lang="en-US" dirty="0"/>
           </a:p>
@@ -19991,7 +19998,7 @@
           <a:p>
             <a:fld id="{4EDE50D6-574B-40AF-946F-D52A04ADE379}" type="datetime1">
               <a:rPr lang="en-US" smtClean="0"/>
-              <a:t>9/21/2025</a:t>
+              <a:t>9/25/2025</a:t>
             </a:fld>
             <a:endParaRPr lang="en-US" dirty="0"/>
           </a:p>
@@ -20368,7 +20375,7 @@
           <a:p>
             <a:fld id="{D82884F1-FFEA-405F-9602-3DCA865EDA4E}" type="datetime1">
               <a:rPr lang="en-US" smtClean="0"/>
-              <a:t>9/21/2025</a:t>
+              <a:t>9/25/2025</a:t>
             </a:fld>
             <a:endParaRPr lang="en-US" dirty="0"/>
           </a:p>
@@ -20661,7 +20668,7 @@
           <a:p>
             <a:fld id="{7E18DB4A-8810-4A10-AD5C-D5E2C667F5B3}" type="datetime1">
               <a:rPr lang="en-US" smtClean="0"/>
-              <a:t>9/21/2025</a:t>
+              <a:t>9/25/2025</a:t>
             </a:fld>
             <a:endParaRPr lang="en-US" dirty="0"/>
           </a:p>
@@ -20853,7 +20860,7 @@
           <a:p>
             <a:fld id="{2CED4963-E985-44C4-B8C4-FDD613B7C2F8}" type="datetime1">
               <a:rPr lang="en-US" smtClean="0"/>
-              <a:t>9/21/2025</a:t>
+              <a:t>9/25/2025</a:t>
             </a:fld>
             <a:endParaRPr lang="en-US" dirty="0"/>
           </a:p>
@@ -21215,7 +21222,7 @@
           <a:p>
             <a:fld id="{ED291B17-9318-49DB-B28B-6E5994AE9581}" type="datetime1">
               <a:rPr lang="en-US" smtClean="0"/>
-              <a:t>9/21/2025</a:t>
+              <a:t>9/25/2025</a:t>
             </a:fld>
             <a:endParaRPr lang="en-US" dirty="0"/>
           </a:p>
@@ -21604,7 +21611,7 @@
           <a:p>
             <a:fld id="{5CF7382D-DEC2-4064-84F2-56AF48079030}" type="datetime1">
               <a:rPr lang="en-US" smtClean="0"/>
-              <a:t>9/21/2025</a:t>
+              <a:t>9/25/2025</a:t>
             </a:fld>
             <a:endParaRPr lang="en-US"/>
           </a:p>
@@ -22066,7 +22073,7 @@
           <a:p>
             <a:fld id="{D59E25F9-7C58-4ADD-B4E8-3E3F2DD7C261}" type="datetime1">
               <a:rPr lang="en-US" smtClean="0"/>
-              <a:t>9/21/2025</a:t>
+              <a:t>9/25/2025</a:t>
             </a:fld>
             <a:endParaRPr lang="en-US"/>
           </a:p>
@@ -22281,7 +22288,7 @@
           <a:p>
             <a:fld id="{78F82ABC-BB26-4212-BE76-C6A697540B8D}" type="datetime1">
               <a:rPr lang="en-US" smtClean="0"/>
-              <a:t>9/21/2025</a:t>
+              <a:t>9/25/2025</a:t>
             </a:fld>
             <a:endParaRPr lang="en-US"/>
           </a:p>
@@ -22404,6 +22411,13 @@
             <a:schemeClr val="lt1"/>
           </a:fontRef>
         </p:style>
+        <p:txBody>
+          <a:bodyPr/>
+          <a:lstStyle/>
+          <a:p>
+            <a:endParaRPr lang="zh-CN" altLang="en-US"/>
+          </a:p>
+        </p:txBody>
       </p:sp>
       <p:sp>
         <p:nvSpPr>
@@ -22441,6 +22455,13 @@
             <a:schemeClr val="lt1"/>
           </a:fontRef>
         </p:style>
+        <p:txBody>
+          <a:bodyPr/>
+          <a:lstStyle/>
+          <a:p>
+            <a:endParaRPr lang="zh-CN" altLang="en-US"/>
+          </a:p>
+        </p:txBody>
       </p:sp>
       <p:sp>
         <p:nvSpPr>
@@ -22478,6 +22499,13 @@
             <a:schemeClr val="lt1"/>
           </a:fontRef>
         </p:style>
+        <p:txBody>
+          <a:bodyPr/>
+          <a:lstStyle/>
+          <a:p>
+            <a:endParaRPr lang="zh-CN" altLang="en-US"/>
+          </a:p>
+        </p:txBody>
       </p:sp>
     </p:spTree>
     <p:extLst>
@@ -23062,7 +23090,7 @@
           <a:p>
             <a:fld id="{61ED8BDC-014F-440E-B651-A3D5A758B980}" type="datetime1">
               <a:rPr lang="en-US" smtClean="0"/>
-              <a:t>9/21/2025</a:t>
+              <a:t>9/25/2025</a:t>
             </a:fld>
             <a:endParaRPr lang="en-US"/>
           </a:p>
@@ -23185,6 +23213,13 @@
             <a:schemeClr val="lt1"/>
           </a:fontRef>
         </p:style>
+        <p:txBody>
+          <a:bodyPr/>
+          <a:lstStyle/>
+          <a:p>
+            <a:endParaRPr lang="zh-CN" altLang="en-US"/>
+          </a:p>
+        </p:txBody>
       </p:sp>
       <p:sp>
         <p:nvSpPr>
@@ -23222,6 +23257,13 @@
             <a:schemeClr val="lt1"/>
           </a:fontRef>
         </p:style>
+        <p:txBody>
+          <a:bodyPr/>
+          <a:lstStyle/>
+          <a:p>
+            <a:endParaRPr lang="zh-CN" altLang="en-US"/>
+          </a:p>
+        </p:txBody>
       </p:sp>
       <p:sp>
         <p:nvSpPr>
@@ -23259,6 +23301,13 @@
             <a:schemeClr val="lt1"/>
           </a:fontRef>
         </p:style>
+        <p:txBody>
+          <a:bodyPr/>
+          <a:lstStyle/>
+          <a:p>
+            <a:endParaRPr lang="zh-CN" altLang="en-US"/>
+          </a:p>
+        </p:txBody>
       </p:sp>
     </p:spTree>
     <p:extLst>
@@ -23843,7 +23892,7 @@
           <a:p>
             <a:fld id="{8234BEC2-5A9D-42E1-9C16-1E9F257755B7}" type="datetime1">
               <a:rPr lang="en-US" smtClean="0"/>
-              <a:t>9/21/2025</a:t>
+              <a:t>9/25/2025</a:t>
             </a:fld>
             <a:endParaRPr lang="en-US"/>
           </a:p>
@@ -23966,6 +24015,13 @@
             <a:schemeClr val="lt1"/>
           </a:fontRef>
         </p:style>
+        <p:txBody>
+          <a:bodyPr/>
+          <a:lstStyle/>
+          <a:p>
+            <a:endParaRPr lang="zh-CN" altLang="en-US"/>
+          </a:p>
+        </p:txBody>
       </p:sp>
       <p:sp>
         <p:nvSpPr>
@@ -24003,6 +24059,13 @@
             <a:schemeClr val="lt1"/>
           </a:fontRef>
         </p:style>
+        <p:txBody>
+          <a:bodyPr/>
+          <a:lstStyle/>
+          <a:p>
+            <a:endParaRPr lang="zh-CN" altLang="en-US"/>
+          </a:p>
+        </p:txBody>
       </p:sp>
       <p:sp>
         <p:nvSpPr>
@@ -24040,6 +24103,13 @@
             <a:schemeClr val="lt1"/>
           </a:fontRef>
         </p:style>
+        <p:txBody>
+          <a:bodyPr/>
+          <a:lstStyle/>
+          <a:p>
+            <a:endParaRPr lang="zh-CN" altLang="en-US"/>
+          </a:p>
+        </p:txBody>
       </p:sp>
     </p:spTree>
     <p:extLst>
@@ -24624,7 +24694,7 @@
           <a:p>
             <a:fld id="{ED291B17-9318-49DB-B28B-6E5994AE9581}" type="datetime1">
               <a:rPr lang="en-US" smtClean="0"/>
-              <a:t>9/21/2025</a:t>
+              <a:t>9/25/2025</a:t>
             </a:fld>
             <a:endParaRPr lang="en-US" dirty="0"/>
           </a:p>
@@ -24746,6 +24816,13 @@
             <a:schemeClr val="lt1"/>
           </a:fontRef>
         </p:style>
+        <p:txBody>
+          <a:bodyPr/>
+          <a:lstStyle/>
+          <a:p>
+            <a:endParaRPr lang="zh-CN" altLang="en-US"/>
+          </a:p>
+        </p:txBody>
       </p:sp>
       <p:sp>
         <p:nvSpPr>
@@ -24783,6 +24860,13 @@
             <a:schemeClr val="lt1"/>
           </a:fontRef>
         </p:style>
+        <p:txBody>
+          <a:bodyPr/>
+          <a:lstStyle/>
+          <a:p>
+            <a:endParaRPr lang="zh-CN" altLang="en-US"/>
+          </a:p>
+        </p:txBody>
       </p:sp>
       <p:sp>
         <p:nvSpPr>
@@ -24820,6 +24904,13 @@
             <a:schemeClr val="lt1"/>
           </a:fontRef>
         </p:style>
+        <p:txBody>
+          <a:bodyPr/>
+          <a:lstStyle/>
+          <a:p>
+            <a:endParaRPr lang="zh-CN" altLang="en-US"/>
+          </a:p>
+        </p:txBody>
       </p:sp>
     </p:spTree>
     <p:extLst>
@@ -25405,7 +25496,7 @@
           <a:p>
             <a:fld id="{ED291B17-9318-49DB-B28B-6E5994AE9581}" type="datetime1">
               <a:rPr lang="en-US" smtClean="0"/>
-              <a:t>9/21/2025</a:t>
+              <a:t>9/25/2025</a:t>
             </a:fld>
             <a:endParaRPr lang="en-US" dirty="0"/>
           </a:p>
@@ -25527,6 +25618,13 @@
             <a:schemeClr val="lt1"/>
           </a:fontRef>
         </p:style>
+        <p:txBody>
+          <a:bodyPr/>
+          <a:lstStyle/>
+          <a:p>
+            <a:endParaRPr lang="zh-CN" altLang="en-US"/>
+          </a:p>
+        </p:txBody>
       </p:sp>
       <p:sp>
         <p:nvSpPr>
@@ -25564,6 +25662,13 @@
             <a:schemeClr val="lt1"/>
           </a:fontRef>
         </p:style>
+        <p:txBody>
+          <a:bodyPr/>
+          <a:lstStyle/>
+          <a:p>
+            <a:endParaRPr lang="zh-CN" altLang="en-US"/>
+          </a:p>
+        </p:txBody>
       </p:sp>
       <p:sp>
         <p:nvSpPr>
@@ -25601,6 +25706,13 @@
             <a:schemeClr val="lt1"/>
           </a:fontRef>
         </p:style>
+        <p:txBody>
+          <a:bodyPr/>
+          <a:lstStyle/>
+          <a:p>
+            <a:endParaRPr lang="zh-CN" altLang="en-US"/>
+          </a:p>
+        </p:txBody>
       </p:sp>
     </p:spTree>
     <p:extLst>
@@ -26186,7 +26298,7 @@
           <a:p>
             <a:fld id="{ED291B17-9318-49DB-B28B-6E5994AE9581}" type="datetime1">
               <a:rPr lang="en-US" smtClean="0"/>
-              <a:t>9/21/2025</a:t>
+              <a:t>9/25/2025</a:t>
             </a:fld>
             <a:endParaRPr lang="en-US" dirty="0"/>
           </a:p>
@@ -26308,6 +26420,13 @@
             <a:schemeClr val="lt1"/>
           </a:fontRef>
         </p:style>
+        <p:txBody>
+          <a:bodyPr/>
+          <a:lstStyle/>
+          <a:p>
+            <a:endParaRPr lang="zh-CN" altLang="en-US"/>
+          </a:p>
+        </p:txBody>
       </p:sp>
       <p:sp>
         <p:nvSpPr>
@@ -26345,6 +26464,13 @@
             <a:schemeClr val="lt1"/>
           </a:fontRef>
         </p:style>
+        <p:txBody>
+          <a:bodyPr/>
+          <a:lstStyle/>
+          <a:p>
+            <a:endParaRPr lang="zh-CN" altLang="en-US"/>
+          </a:p>
+        </p:txBody>
       </p:sp>
       <p:sp>
         <p:nvSpPr>
@@ -26382,6 +26508,13 @@
             <a:schemeClr val="lt1"/>
           </a:fontRef>
         </p:style>
+        <p:txBody>
+          <a:bodyPr/>
+          <a:lstStyle/>
+          <a:p>
+            <a:endParaRPr lang="zh-CN" altLang="en-US"/>
+          </a:p>
+        </p:txBody>
       </p:sp>
     </p:spTree>
     <p:extLst>
@@ -26966,7 +27099,7 @@
           <a:p>
             <a:fld id="{ED291B17-9318-49DB-B28B-6E5994AE9581}" type="datetime1">
               <a:rPr lang="en-US" smtClean="0"/>
-              <a:t>9/21/2025</a:t>
+              <a:t>9/25/2025</a:t>
             </a:fld>
             <a:endParaRPr lang="en-US" dirty="0"/>
           </a:p>
@@ -27088,6 +27221,13 @@
             <a:schemeClr val="lt1"/>
           </a:fontRef>
         </p:style>
+        <p:txBody>
+          <a:bodyPr/>
+          <a:lstStyle/>
+          <a:p>
+            <a:endParaRPr lang="zh-CN" altLang="en-US"/>
+          </a:p>
+        </p:txBody>
       </p:sp>
       <p:sp>
         <p:nvSpPr>
@@ -27125,6 +27265,13 @@
             <a:schemeClr val="lt1"/>
           </a:fontRef>
         </p:style>
+        <p:txBody>
+          <a:bodyPr/>
+          <a:lstStyle/>
+          <a:p>
+            <a:endParaRPr lang="zh-CN" altLang="en-US"/>
+          </a:p>
+        </p:txBody>
       </p:sp>
       <p:sp>
         <p:nvSpPr>
@@ -27162,6 +27309,13 @@
             <a:schemeClr val="lt1"/>
           </a:fontRef>
         </p:style>
+        <p:txBody>
+          <a:bodyPr/>
+          <a:lstStyle/>
+          <a:p>
+            <a:endParaRPr lang="zh-CN" altLang="en-US"/>
+          </a:p>
+        </p:txBody>
       </p:sp>
     </p:spTree>
     <p:extLst>
@@ -34259,7 +34413,7 @@
                   <a:srgbClr val="FFFFFF"/>
                 </a:solidFill>
               </a:rPr>
-              <a:t>6.1 </a:t>
+              <a:t>6.2 </a:t>
             </a:r>
             <a:br>
               <a:rPr lang="en-US" sz="4050" dirty="0">
@@ -34274,7 +34428,7 @@
                   <a:srgbClr val="FFFFFF"/>
                 </a:solidFill>
               </a:rPr>
-              <a:t>Attribute table</a:t>
+              <a:t>CLASSIFICATION</a:t>
             </a:r>
           </a:p>
         </p:txBody>
@@ -36787,95 +36941,15 @@
         </p:nvSpPr>
         <p:spPr>
           <a:xfrm>
-            <a:off x="302741" y="1029962"/>
-            <a:ext cx="7679724" cy="3886200"/>
+            <a:off x="2421101" y="1085160"/>
+            <a:ext cx="4071139" cy="3886200"/>
           </a:xfrm>
         </p:spPr>
         <p:txBody>
           <a:bodyPr>
-            <a:normAutofit fontScale="62500" lnSpcReduction="20000"/>
+            <a:normAutofit/>
           </a:bodyPr>
           <a:lstStyle/>
-          <a:p>
-            <a:pPr>
-              <a:buFont typeface="Courier New" panose="02070309020205020404" pitchFamily="49" charset="0"/>
-              <a:buChar char="o"/>
-            </a:pPr>
-            <a:r>
-              <a:rPr lang="en-US" altLang="en-US" sz="2600" dirty="0"/>
-              <a:t>Cartography</a:t>
-            </a:r>
-          </a:p>
-          <a:p>
-            <a:pPr lvl="1">
-              <a:buFont typeface="Wingdings" panose="05000000000000000000" pitchFamily="2" charset="2"/>
-              <a:buChar char="ü"/>
-            </a:pPr>
-            <a:r>
-              <a:rPr lang="en-US" altLang="en-US" sz="2240" dirty="0"/>
-              <a:t>What is Cartography?</a:t>
-            </a:r>
-          </a:p>
-          <a:p>
-            <a:pPr lvl="1">
-              <a:buFont typeface="Wingdings" panose="05000000000000000000" pitchFamily="2" charset="2"/>
-              <a:buChar char="ü"/>
-            </a:pPr>
-            <a:r>
-              <a:rPr lang="en-US" altLang="en-US" sz="2240" dirty="0"/>
-              <a:t>What is map?</a:t>
-            </a:r>
-          </a:p>
-          <a:p>
-            <a:pPr>
-              <a:buFont typeface="Courier New" panose="02070309020205020404" pitchFamily="49" charset="0"/>
-              <a:buChar char="o"/>
-            </a:pPr>
-            <a:r>
-              <a:rPr lang="en-US" altLang="en-US" sz="2600" dirty="0"/>
-              <a:t>Data Standardization</a:t>
-            </a:r>
-          </a:p>
-          <a:p>
-            <a:pPr lvl="1">
-              <a:buFont typeface="Wingdings" panose="05000000000000000000" pitchFamily="2" charset="2"/>
-              <a:buChar char="ü"/>
-            </a:pPr>
-            <a:r>
-              <a:rPr lang="en-US" altLang="zh-CN" sz="2240" dirty="0"/>
-              <a:t>Density</a:t>
-            </a:r>
-          </a:p>
-          <a:p>
-            <a:pPr lvl="1">
-              <a:buFont typeface="Wingdings" panose="05000000000000000000" pitchFamily="2" charset="2"/>
-              <a:buChar char="ü"/>
-            </a:pPr>
-            <a:r>
-              <a:rPr lang="en-US" altLang="en-US" sz="2240" dirty="0"/>
-              <a:t>Proportion</a:t>
-            </a:r>
-          </a:p>
-          <a:p>
-            <a:pPr lvl="1">
-              <a:buFont typeface="Wingdings" panose="05000000000000000000" pitchFamily="2" charset="2"/>
-              <a:buChar char="ü"/>
-            </a:pPr>
-            <a:r>
-              <a:rPr lang="en-US" altLang="en-US" sz="2240" dirty="0"/>
-              <a:t>Relationship</a:t>
-            </a:r>
-          </a:p>
-          <a:p>
-            <a:pPr lvl="1">
-              <a:buFont typeface="Wingdings" panose="05000000000000000000" pitchFamily="2" charset="2"/>
-              <a:buChar char="ü"/>
-            </a:pPr>
-            <a:r>
-              <a:rPr lang="en-US" altLang="en-US" sz="2240" dirty="0"/>
-              <a:t>Statistic summaries</a:t>
-            </a:r>
-          </a:p>
           <a:p>
             <a:pPr>
               <a:buFont typeface="Courier New" panose="02070309020205020404" pitchFamily="49" charset="0"/>
@@ -37555,7 +37629,7 @@
         </p:nvSpPr>
         <p:spPr>
           <a:xfrm>
-            <a:off x="118533" y="20780"/>
+            <a:off x="247135" y="227338"/>
             <a:ext cx="8077200" cy="857250"/>
           </a:xfrm>
           <a:prstGeom prst="rect">
@@ -37935,7 +38009,7 @@
         </p:nvSpPr>
         <p:spPr>
           <a:xfrm>
-            <a:off x="118533" y="20780"/>
+            <a:off x="248073" y="148829"/>
             <a:ext cx="8077200" cy="857250"/>
           </a:xfrm>
           <a:prstGeom prst="rect">
@@ -38278,7 +38352,7 @@
         </p:nvSpPr>
         <p:spPr>
           <a:xfrm>
-            <a:off x="118533" y="20780"/>
+            <a:off x="236838" y="169104"/>
             <a:ext cx="8077200" cy="857250"/>
           </a:xfrm>
           <a:prstGeom prst="rect">
@@ -38943,7 +39017,7 @@
         </p:nvSpPr>
         <p:spPr>
           <a:xfrm>
-            <a:off x="118533" y="20780"/>
+            <a:off x="274938" y="145482"/>
             <a:ext cx="8077200" cy="857250"/>
           </a:xfrm>
           <a:prstGeom prst="rect">
